--- a/Healthcare Analytics for Doctor Visits_DIY_Project2.pptx
+++ b/Healthcare Analytics for Doctor Visits_DIY_Project2.pptx
@@ -157,9 +157,61 @@
 <file path=ppt/revisionInfo.xml><?xml version="1.0" encoding="utf-8"?>
 <p1510:revInfo xmlns:a="http://schemas.openxmlformats.org/drawingml/2006/main" xmlns:r="http://schemas.openxmlformats.org/officeDocument/2006/relationships" xmlns:p1510="http://schemas.microsoft.com/office/powerpoint/2015/10/main">
   <p1510:revLst>
-    <p1510:client id="{ED67BBC5-90FB-0B4C-ED85-F72C7BA7CE4A}" v="1" dt="2022-06-06T12:10:26.221"/>
+    <p1510:client id="{390CE060-79D1-4146-976F-3B4DF561E4F7}" v="4" dt="2026-10-01T06:47:24.959"/>
   </p1510:revLst>
 </p1510:revInfo>
+</file>
+
+<file path=ppt/changesInfos/changesInfo1.xml><?xml version="1.0" encoding="utf-8"?>
+<pc:chgInfo xmlns:a="http://schemas.openxmlformats.org/drawingml/2006/main" xmlns:r="http://schemas.openxmlformats.org/officeDocument/2006/relationships" xmlns:ac="http://schemas.microsoft.com/office/drawing/2013/main/command" xmlns:pc="http://schemas.microsoft.com/office/powerpoint/2013/main/command">
+  <pc:docChgLst>
+    <pc:chgData name="Ayush Shetty" userId="13a752855a40ac29" providerId="LiveId" clId="{83F866E6-357C-484F-8429-F0CD62FF7984}"/>
+    <pc:docChg chg="custSel modSld">
+      <pc:chgData name="Ayush Shetty" userId="13a752855a40ac29" providerId="LiveId" clId="{83F866E6-357C-484F-8429-F0CD62FF7984}" dt="2026-10-01T06:47:14.670" v="27" actId="1076"/>
+      <pc:docMkLst>
+        <pc:docMk/>
+      </pc:docMkLst>
+      <pc:sldChg chg="modSp mod">
+        <pc:chgData name="Ayush Shetty" userId="13a752855a40ac29" providerId="LiveId" clId="{83F866E6-357C-484F-8429-F0CD62FF7984}" dt="2026-10-01T06:47:14.670" v="27" actId="1076"/>
+        <pc:sldMkLst>
+          <pc:docMk/>
+          <pc:sldMk cId="1086225493" sldId="339"/>
+        </pc:sldMkLst>
+        <pc:spChg chg="mod">
+          <ac:chgData name="Ayush Shetty" userId="13a752855a40ac29" providerId="LiveId" clId="{83F866E6-357C-484F-8429-F0CD62FF7984}" dt="2026-10-01T06:47:14.670" v="27" actId="1076"/>
+          <ac:spMkLst>
+            <pc:docMk/>
+            <pc:sldMk cId="1086225493" sldId="339"/>
+            <ac:spMk id="9" creationId="{E25373E9-1A26-4A40-9897-E42DE485D8E3}"/>
+          </ac:spMkLst>
+        </pc:spChg>
+      </pc:sldChg>
+      <pc:sldChg chg="modSp mod">
+        <pc:chgData name="Ayush Shetty" userId="13a752855a40ac29" providerId="LiveId" clId="{83F866E6-357C-484F-8429-F0CD62FF7984}" dt="2026-10-01T06:46:13.525" v="16" actId="14100"/>
+        <pc:sldMkLst>
+          <pc:docMk/>
+          <pc:sldMk cId="203062629" sldId="340"/>
+        </pc:sldMkLst>
+        <pc:spChg chg="mod">
+          <ac:chgData name="Ayush Shetty" userId="13a752855a40ac29" providerId="LiveId" clId="{83F866E6-357C-484F-8429-F0CD62FF7984}" dt="2026-10-01T06:46:13.525" v="16" actId="14100"/>
+          <ac:spMkLst>
+            <pc:docMk/>
+            <pc:sldMk cId="203062629" sldId="340"/>
+            <ac:spMk id="9" creationId="{925255C0-7B10-2340-3329-13A8A866B781}"/>
+          </ac:spMkLst>
+        </pc:spChg>
+        <pc:picChg chg="mod">
+          <ac:chgData name="Ayush Shetty" userId="13a752855a40ac29" providerId="LiveId" clId="{83F866E6-357C-484F-8429-F0CD62FF7984}" dt="2026-10-01T06:45:24.090" v="2" actId="1076"/>
+          <ac:picMkLst>
+            <pc:docMk/>
+            <pc:sldMk cId="203062629" sldId="340"/>
+            <ac:picMk id="5" creationId="{8F37C2F8-553D-7093-3807-E68FB528C358}"/>
+          </ac:picMkLst>
+        </pc:picChg>
+      </pc:sldChg>
+    </pc:docChg>
+  </pc:docChgLst>
+</pc:chgInfo>
 </file>
 
 <file path=ppt/handoutMasters/handoutMaster1.xml><?xml version="1.0" encoding="utf-8"?>
@@ -17508,8 +17560,8 @@
         </p:nvSpPr>
         <p:spPr>
           <a:xfrm>
-            <a:off x="422959" y="5737443"/>
-            <a:ext cx="2981643" cy="830997"/>
+            <a:off x="422959" y="5965662"/>
+            <a:ext cx="6150672" cy="666079"/>
           </a:xfrm>
           <a:prstGeom prst="rect">
             <a:avLst/>
@@ -17593,25 +17645,12 @@
           </a:lstStyle>
           <a:p>
             <a:r>
-              <a:rPr lang="en-GB" dirty="0"/>
-              <a:t> </a:t>
+              <a:rPr lang="en-GB" sz="1600" dirty="0">
+                <a:hlinkClick r:id="rId3"/>
+              </a:rPr>
+              <a:t>https://github.com/ayushshetty007/Healthcare-Analytics-for-Doctor-Visits</a:t>
             </a:r>
-            <a:r>
-              <a:rPr lang="en-GB" sz="2000" b="0" u="sng" dirty="0">
-                <a:solidFill>
-                  <a:srgbClr val="0070C0"/>
-                </a:solidFill>
-                <a:hlinkClick r:id="rId3" action="ppaction://hlinkfile">
-                  <a:extLst>
-                    <a:ext uri="{A12FA001-AC4F-418D-AE19-62706E023703}">
-                      <ahyp:hlinkClr xmlns:ahyp="http://schemas.microsoft.com/office/drawing/2018/hyperlinkcolor" val="tx"/>
-                    </a:ext>
-                  </a:extLst>
-                </a:hlinkClick>
-              </a:rPr>
-              <a:t>Demo Link</a:t>
-            </a:r>
-            <a:endParaRPr lang="en-IN" b="0" u="sng" dirty="0">
+            <a:endParaRPr lang="en-IN" sz="1600" b="0" u="sng" dirty="0">
               <a:solidFill>
                 <a:srgbClr val="0070C0"/>
               </a:solidFill>
@@ -18162,7 +18201,7 @@
         </p:blipFill>
         <p:spPr>
           <a:xfrm>
-            <a:off x="675957" y="6471920"/>
+            <a:off x="654165" y="6487411"/>
             <a:ext cx="2143125" cy="193040"/>
           </a:xfrm>
           <a:prstGeom prst="rect">
@@ -18734,8 +18773,8 @@
         </p:nvSpPr>
         <p:spPr>
           <a:xfrm>
-            <a:off x="422959" y="5737443"/>
-            <a:ext cx="2981643" cy="830997"/>
+            <a:off x="403527" y="6218420"/>
+            <a:ext cx="6370497" cy="666079"/>
           </a:xfrm>
           <a:prstGeom prst="rect">
             <a:avLst/>
@@ -18819,25 +18858,12 @@
           </a:lstStyle>
           <a:p>
             <a:r>
-              <a:rPr lang="en-GB" dirty="0"/>
-              <a:t> </a:t>
+              <a:rPr lang="en-GB" sz="1600" dirty="0">
+                <a:hlinkClick r:id="rId3"/>
+              </a:rPr>
+              <a:t>https://github.com/ayushshetty007/Healthcare-Analytics-for-Doctor-Visits</a:t>
             </a:r>
-            <a:r>
-              <a:rPr lang="en-GB" sz="2000" b="0" u="sng" dirty="0">
-                <a:solidFill>
-                  <a:srgbClr val="0070C0"/>
-                </a:solidFill>
-                <a:hlinkClick r:id="rId3" action="ppaction://hlinkfile">
-                  <a:extLst>
-                    <a:ext uri="{A12FA001-AC4F-418D-AE19-62706E023703}">
-                      <ahyp:hlinkClr xmlns:ahyp="http://schemas.microsoft.com/office/drawing/2018/hyperlinkcolor" val="tx"/>
-                    </a:ext>
-                  </a:extLst>
-                </a:hlinkClick>
-              </a:rPr>
-              <a:t>Demo Link</a:t>
-            </a:r>
-            <a:endParaRPr lang="en-IN" b="0" u="sng" dirty="0">
+            <a:endParaRPr lang="en-IN" sz="1600" b="0" u="sng" dirty="0">
               <a:solidFill>
                 <a:srgbClr val="0070C0"/>
               </a:solidFill>
@@ -22212,12 +22238,12 @@
 </file>
 
 <file path=customXml/item1.xml><?xml version="1.0" encoding="utf-8"?>
-<?mso-contentType ?>
-<FormTemplates xmlns="http://schemas.microsoft.com/sharepoint/v3/contenttype/forms">
-  <Display>DocumentLibraryForm</Display>
-  <Edit>DocumentLibraryForm</Edit>
-  <New>DocumentLibraryForm</New>
-</FormTemplates>
+<p:properties xmlns:p="http://schemas.microsoft.com/office/2006/metadata/properties" xmlns:xsi="http://www.w3.org/2001/XMLSchema-instance" xmlns:pc="http://schemas.microsoft.com/office/infopath/2007/PartnerControls">
+  <documentManagement>
+    <Status xmlns="71af3243-3dd4-4a8d-8c0d-dd76da1f02a5">Not started</Status>
+    <MediaServiceKeyPoints xmlns="71af3243-3dd4-4a8d-8c0d-dd76da1f02a5" xsi:nil="true"/>
+  </documentManagement>
+</p:properties>
 </file>
 
 <file path=customXml/item2.xml><?xml version="1.0" encoding="utf-8"?>
@@ -22442,18 +22468,20 @@
 </file>
 
 <file path=customXml/item3.xml><?xml version="1.0" encoding="utf-8"?>
-<p:properties xmlns:p="http://schemas.microsoft.com/office/2006/metadata/properties" xmlns:xsi="http://www.w3.org/2001/XMLSchema-instance" xmlns:pc="http://schemas.microsoft.com/office/infopath/2007/PartnerControls">
-  <documentManagement>
-    <Status xmlns="71af3243-3dd4-4a8d-8c0d-dd76da1f02a5">Not started</Status>
-    <MediaServiceKeyPoints xmlns="71af3243-3dd4-4a8d-8c0d-dd76da1f02a5" xsi:nil="true"/>
-  </documentManagement>
-</p:properties>
+<?mso-contentType ?>
+<FormTemplates xmlns="http://schemas.microsoft.com/sharepoint/v3/contenttype/forms">
+  <Display>DocumentLibraryForm</Display>
+  <Edit>DocumentLibraryForm</Edit>
+  <New>DocumentLibraryForm</New>
+</FormTemplates>
 </file>
 
 <file path=customXml/itemProps1.xml><?xml version="1.0" encoding="utf-8"?>
-<ds:datastoreItem xmlns:ds="http://schemas.openxmlformats.org/officeDocument/2006/customXml" ds:itemID="{05D99ABA-76CE-4A8E-B5F0-C051B96628DE}">
+<ds:datastoreItem xmlns:ds="http://schemas.openxmlformats.org/officeDocument/2006/customXml" ds:itemID="{4DEA9014-ED64-4558-B1E1-D03F0EE32BEB}">
   <ds:schemaRefs>
-    <ds:schemaRef ds:uri="http://schemas.microsoft.com/sharepoint/v3/contenttype/forms"/>
+    <ds:schemaRef ds:uri="http://schemas.microsoft.com/office/2006/metadata/properties"/>
+    <ds:schemaRef ds:uri="http://schemas.microsoft.com/office/infopath/2007/PartnerControls"/>
+    <ds:schemaRef ds:uri="71af3243-3dd4-4a8d-8c0d-dd76da1f02a5"/>
   </ds:schemaRefs>
 </ds:datastoreItem>
 </file>
@@ -22478,11 +22506,9 @@
 </file>
 
 <file path=customXml/itemProps3.xml><?xml version="1.0" encoding="utf-8"?>
-<ds:datastoreItem xmlns:ds="http://schemas.openxmlformats.org/officeDocument/2006/customXml" ds:itemID="{4DEA9014-ED64-4558-B1E1-D03F0EE32BEB}">
+<ds:datastoreItem xmlns:ds="http://schemas.openxmlformats.org/officeDocument/2006/customXml" ds:itemID="{05D99ABA-76CE-4A8E-B5F0-C051B96628DE}">
   <ds:schemaRefs>
-    <ds:schemaRef ds:uri="http://schemas.microsoft.com/office/2006/metadata/properties"/>
-    <ds:schemaRef ds:uri="http://schemas.microsoft.com/office/infopath/2007/PartnerControls"/>
-    <ds:schemaRef ds:uri="71af3243-3dd4-4a8d-8c0d-dd76da1f02a5"/>
+    <ds:schemaRef ds:uri="http://schemas.microsoft.com/sharepoint/v3/contenttype/forms"/>
   </ds:schemaRefs>
 </ds:datastoreItem>
 </file>